--- a/dist/초2/수학/수와계산/초2_수학_수와계산_09_4단과8단_학생용.pptx
+++ b/dist/초2/수학/수와계산/초2_수학_수와계산_09_4단과8단_학생용.pptx
@@ -120,13 +120,13 @@
   <p:extLst>
     <p:ext uri="{521415D9-36F7-43E2-AB2F-B90AF26B5E84}">
       <p14:sectionLst xmlns:p14="http://schemas.microsoft.com/office/powerpoint/2010/main">
-        <p14:section name="도입" id="{ebfee14f-0bfe-9a1d-c237-4f1d4fec31ae}">
+        <p14:section name="도입" id="{35b0471c-07c2-7d25-82df-ddd1e28cb6a6}">
           <p14:sldIdLst>
             <p14:sldId id="256"/>
             <p14:sldId id="257"/>
           </p14:sldIdLst>
         </p14:section>
-        <p14:section name="개념" id="{af3fe34c-7d9a-08c1-1c34-1263ad3c990e}">
+        <p14:section name="개념" id="{ea4bcb6a-5454-f85a-09b1-7616c3fcde42}">
           <p14:sldIdLst>
             <p14:sldId id="258"/>
             <p14:sldId id="259"/>
@@ -136,24 +136,24 @@
             <p14:sldId id="263"/>
           </p14:sldIdLst>
         </p14:section>
-        <p14:section name="연습" id="{764b39ff-fb70-fd45-dd49-2a7ea2602d47}">
+        <p14:section name="연습" id="{68e4dca9-2699-0dc1-af3f-1029d7a66a8d}">
           <p14:sldIdLst>
             <p14:sldId id="264"/>
             <p14:sldId id="265"/>
           </p14:sldIdLst>
         </p14:section>
-        <p14:section name="확인" id="{6218a6c6-e6f0-7735-a88e-da275cf8a866}">
+        <p14:section name="확인" id="{89254bd1-28ef-94f4-b5ae-8aac8238723c}">
           <p14:sldIdLst>
             <p14:sldId id="266"/>
             <p14:sldId id="267"/>
           </p14:sldIdLst>
         </p14:section>
-        <p14:section name="정리" id="{77c2a7f8-dc73-c0ff-861d-ec50b0cbbdcc}">
+        <p14:section name="정리" id="{0823f6e9-6538-d951-774e-be9bf2c1a53a}">
           <p14:sldIdLst>
             <p14:sldId id="268"/>
           </p14:sldIdLst>
         </p14:section>
-        <p14:section name="보충" id="{75fa387f-1121-f8cf-c89f-41e994e02f70}">
+        <p14:section name="보충" id="{872b658e-70f8-de02-a260-2803428b8ad8}">
           <p14:sldIdLst>
             <p14:sldId id="269"/>
           </p14:sldIdLst>

--- a/dist/초2/수학/수와계산/초2_수학_수와계산_09_4단과8단_학생용.pptx
+++ b/dist/초2/수학/수와계산/초2_수학_수와계산_09_4단과8단_학생용.pptx
@@ -120,13 +120,13 @@
   <p:extLst>
     <p:ext uri="{521415D9-36F7-43E2-AB2F-B90AF26B5E84}">
       <p14:sectionLst xmlns:p14="http://schemas.microsoft.com/office/powerpoint/2010/main">
-        <p14:section name="도입" id="{35b0471c-07c2-7d25-82df-ddd1e28cb6a6}">
+        <p14:section name="도입" id="{bd12eb57-78f1-50a4-c1aa-3bbe64d4278d}">
           <p14:sldIdLst>
             <p14:sldId id="256"/>
             <p14:sldId id="257"/>
           </p14:sldIdLst>
         </p14:section>
-        <p14:section name="개념" id="{ea4bcb6a-5454-f85a-09b1-7616c3fcde42}">
+        <p14:section name="개념" id="{93a57f7c-5167-4b57-5514-e3f3024a6acb}">
           <p14:sldIdLst>
             <p14:sldId id="258"/>
             <p14:sldId id="259"/>
@@ -136,24 +136,24 @@
             <p14:sldId id="263"/>
           </p14:sldIdLst>
         </p14:section>
-        <p14:section name="연습" id="{68e4dca9-2699-0dc1-af3f-1029d7a66a8d}">
+        <p14:section name="연습" id="{00e6137c-f256-334f-acfd-01670cc63c50}">
           <p14:sldIdLst>
             <p14:sldId id="264"/>
             <p14:sldId id="265"/>
           </p14:sldIdLst>
         </p14:section>
-        <p14:section name="확인" id="{89254bd1-28ef-94f4-b5ae-8aac8238723c}">
+        <p14:section name="확인" id="{b382b47b-6641-c2ef-47b1-d5accd5fe2dc}">
           <p14:sldIdLst>
             <p14:sldId id="266"/>
             <p14:sldId id="267"/>
           </p14:sldIdLst>
         </p14:section>
-        <p14:section name="정리" id="{0823f6e9-6538-d951-774e-be9bf2c1a53a}">
+        <p14:section name="정리" id="{11c0fb93-850f-4468-9393-26d0d0f35509}">
           <p14:sldIdLst>
             <p14:sldId id="268"/>
           </p14:sldIdLst>
         </p14:section>
-        <p14:section name="보충" id="{872b658e-70f8-de02-a260-2803428b8ad8}">
+        <p14:section name="보충" id="{ec83a2d2-3af6-b87c-f368-77e0bada10f0}">
           <p14:sldIdLst>
             <p14:sldId id="269"/>
           </p14:sldIdLst>
@@ -11915,7 +11915,7 @@
           </p:nvPr>
         </p:nvGraphicFramePr>
         <p:xfrm>
-          <a:off x="548640" y="3037840"/>
+          <a:off x="548640" y="3054350"/>
           <a:ext cx="11091672" cy="914400"/>
         </p:xfrm>
         <a:graphic>
@@ -11933,7 +11933,7 @@
                 <a:gridCol w="1232408"/>
                 <a:gridCol w="1232408"/>
               </a:tblGrid>
-              <a:tr h="528320">
+              <a:tr h="511810">
                 <a:tc>
                   <a:txBody>
                     <a:bodyPr/>
@@ -12547,7 +12547,7 @@
                   </a:tcPr>
                 </a:tc>
               </a:tr>
-              <a:tr h="528320">
+              <a:tr h="511810">
                 <a:tc>
                   <a:txBody>
                     <a:bodyPr/>
@@ -16594,7 +16594,7 @@
           </p:nvPr>
         </p:nvGraphicFramePr>
         <p:xfrm>
-          <a:off x="548640" y="2773680"/>
+          <a:off x="548640" y="2798445"/>
           <a:ext cx="11091672" cy="914400"/>
         </p:xfrm>
         <a:graphic>
@@ -16613,7 +16613,7 @@
                 <a:gridCol w="1109167"/>
                 <a:gridCol w="1109167"/>
               </a:tblGrid>
-              <a:tr h="528320">
+              <a:tr h="511810">
                 <a:tc>
                   <a:txBody>
                     <a:bodyPr/>
@@ -17295,7 +17295,7 @@
                   </a:tcPr>
                 </a:tc>
               </a:tr>
-              <a:tr h="528320">
+              <a:tr h="511810">
                 <a:tc>
                   <a:txBody>
                     <a:bodyPr/>
@@ -17977,7 +17977,7 @@
                   </a:tcPr>
                 </a:tc>
               </a:tr>
-              <a:tr h="528320">
+              <a:tr h="511810">
                 <a:tc>
                   <a:txBody>
                     <a:bodyPr/>
